--- a/Reports/Final_PPT.pptx
+++ b/Reports/Final_PPT.pptx
@@ -5,7 +5,7 @@
     <p:sldMasterId id="2147483648" r:id="rId1"/>
   </p:sldMasterIdLst>
   <p:notesMasterIdLst>
-    <p:notesMasterId r:id="rId40"/>
+    <p:notesMasterId r:id="rId41"/>
   </p:notesMasterIdLst>
   <p:sldIdLst>
     <p:sldId id="256" r:id="rId2"/>
@@ -45,7 +45,8 @@
     <p:sldId id="273" r:id="rId36"/>
     <p:sldId id="275" r:id="rId37"/>
     <p:sldId id="276" r:id="rId38"/>
-    <p:sldId id="274" r:id="rId39"/>
+    <p:sldId id="297" r:id="rId39"/>
+    <p:sldId id="274" r:id="rId40"/>
   </p:sldIdLst>
   <p:sldSz cx="9144000" cy="5143500" type="screen16x9"/>
   <p:notesSz cx="5143500" cy="9144000"/>
@@ -8467,12 +8468,6 @@
             <c:idx val="0"/>
             <c:invertIfNegative val="0"/>
             <c:bubble3D val="0"/>
-            <c:spPr>
-              <a:solidFill>
-                <a:srgbClr val="6D28D9"/>
-              </a:solidFill>
-              <a:effectLst/>
-            </c:spPr>
             <c:extLst>
               <c:ext xmlns:c16="http://schemas.microsoft.com/office/drawing/2014/chart" uri="{C3380CC4-5D6E-409C-BE32-E72D297353CC}">
                 <c16:uniqueId val="{00000001-5495-45B6-87F6-893166EACBD4}"/>
@@ -8483,12 +8478,6 @@
             <c:idx val="1"/>
             <c:invertIfNegative val="0"/>
             <c:bubble3D val="0"/>
-            <c:spPr>
-              <a:solidFill>
-                <a:srgbClr val="6D28D9"/>
-              </a:solidFill>
-              <a:effectLst/>
-            </c:spPr>
             <c:extLst>
               <c:ext xmlns:c16="http://schemas.microsoft.com/office/drawing/2014/chart" uri="{C3380CC4-5D6E-409C-BE32-E72D297353CC}">
                 <c16:uniqueId val="{00000003-5495-45B6-87F6-893166EACBD4}"/>
@@ -13819,6 +13808,90 @@
             <a:fld id="{F7021451-1387-4CA6-816F-3879F97B5CBC}" type="slidenum">
               <a:rPr lang="en-US"/>
               <a:t>38</a:t>
+            </a:fld>
+            <a:endParaRPr lang="en-US"/>
+          </a:p>
+        </p:txBody>
+      </p:sp>
+    </p:spTree>
+    <p:extLst>
+      <p:ext uri="{BB962C8B-B14F-4D97-AF65-F5344CB8AC3E}">
+        <p14:creationId xmlns:p14="http://schemas.microsoft.com/office/powerpoint/2010/main" val="1024086991"/>
+      </p:ext>
+    </p:extLst>
+  </p:cSld>
+  <p:clrMapOvr>
+    <a:masterClrMapping/>
+  </p:clrMapOvr>
+</p:notes>
+</file>
+
+<file path=ppt/notesSlides/notesSlide36.xml><?xml version="1.0" encoding="utf-8"?>
+<p:notes xmlns:a="http://schemas.openxmlformats.org/drawingml/2006/main" xmlns:r="http://schemas.openxmlformats.org/officeDocument/2006/relationships" xmlns:p="http://schemas.openxmlformats.org/presentationml/2006/main">
+  <p:cSld>
+    <p:spTree>
+      <p:nvGrpSpPr>
+        <p:cNvPr id="1" name=""/>
+        <p:cNvGrpSpPr/>
+        <p:nvPr/>
+      </p:nvGrpSpPr>
+      <p:grpSpPr>
+        <a:xfrm>
+          <a:off x="0" y="0"/>
+          <a:ext cx="0" cy="0"/>
+          <a:chOff x="0" y="0"/>
+          <a:chExt cx="0" cy="0"/>
+        </a:xfrm>
+      </p:grpSpPr>
+      <p:sp>
+        <p:nvSpPr>
+          <p:cNvPr id="2" name="Slide Image Placeholder 1"/>
+          <p:cNvSpPr>
+            <a:spLocks noGrp="1" noRot="1" noChangeAspect="1"/>
+          </p:cNvSpPr>
+          <p:nvPr>
+            <p:ph type="sldImg"/>
+          </p:nvPr>
+        </p:nvSpPr>
+        <p:spPr/>
+      </p:sp>
+      <p:sp>
+        <p:nvSpPr>
+          <p:cNvPr id="3" name="Notes Placeholder 2"/>
+          <p:cNvSpPr>
+            <a:spLocks noGrp="1"/>
+          </p:cNvSpPr>
+          <p:nvPr>
+            <p:ph type="body" idx="1"/>
+          </p:nvPr>
+        </p:nvSpPr>
+        <p:spPr/>
+        <p:txBody>
+          <a:bodyPr/>
+          <a:lstStyle/>
+          <a:p>
+            <a:endParaRPr lang="en-US" dirty="0"/>
+          </a:p>
+        </p:txBody>
+      </p:sp>
+      <p:sp>
+        <p:nvSpPr>
+          <p:cNvPr id="4" name="Slide Number Placeholder 3"/>
+          <p:cNvSpPr>
+            <a:spLocks noGrp="1"/>
+          </p:cNvSpPr>
+          <p:nvPr>
+            <p:ph type="sldNum" sz="quarter" idx="10"/>
+          </p:nvPr>
+        </p:nvSpPr>
+        <p:spPr/>
+        <p:txBody>
+          <a:bodyPr/>
+          <a:lstStyle/>
+          <a:p>
+            <a:fld id="{F7021451-1387-4CA6-816F-3879F97B5CBC}" type="slidenum">
+              <a:rPr lang="en-US"/>
+              <a:t>39</a:t>
             </a:fld>
             <a:endParaRPr lang="en-US"/>
           </a:p>
@@ -42221,6 +42294,1418 @@
 </file>
 
 <file path=ppt/slides/slide38.xml><?xml version="1.0" encoding="utf-8"?>
+<p:sld xmlns:a="http://schemas.openxmlformats.org/drawingml/2006/main" xmlns:r="http://schemas.openxmlformats.org/officeDocument/2006/relationships" xmlns:p="http://schemas.openxmlformats.org/presentationml/2006/main">
+  <p:cSld>
+    <p:spTree>
+      <p:nvGrpSpPr>
+        <p:cNvPr id="1" name=""/>
+        <p:cNvGrpSpPr/>
+        <p:nvPr/>
+      </p:nvGrpSpPr>
+      <p:grpSpPr>
+        <a:xfrm>
+          <a:off x="0" y="0"/>
+          <a:ext cx="0" cy="0"/>
+          <a:chOff x="0" y="0"/>
+          <a:chExt cx="0" cy="0"/>
+        </a:xfrm>
+      </p:grpSpPr>
+      <p:sp>
+        <p:nvSpPr>
+          <p:cNvPr id="2" name="Text 0"/>
+          <p:cNvSpPr/>
+          <p:nvPr/>
+        </p:nvSpPr>
+        <p:spPr>
+          <a:xfrm>
+            <a:off x="411480" y="164592"/>
+            <a:ext cx="8321040" cy="530352"/>
+          </a:xfrm>
+          <a:prstGeom prst="rect">
+            <a:avLst/>
+          </a:prstGeom>
+          <a:noFill/>
+          <a:ln/>
+        </p:spPr>
+        <p:txBody>
+          <a:bodyPr wrap="square" lIns="0" tIns="0" rIns="0" bIns="0" rtlCol="0" anchor="ctr"/>
+          <a:lstStyle/>
+          <a:p>
+            <a:pPr marL="0" indent="0">
+              <a:buNone/>
+            </a:pPr>
+            <a:r>
+              <a:rPr lang="en-US" sz="2100" b="1" dirty="0">
+                <a:solidFill>
+                  <a:srgbClr val="0D1B2A"/>
+                </a:solidFill>
+                <a:latin typeface="Calibri" pitchFamily="34" charset="0"/>
+                <a:ea typeface="Calibri" pitchFamily="34" charset="-122"/>
+                <a:cs typeface="Calibri" pitchFamily="34" charset="-120"/>
+              </a:rPr>
+              <a:t>Model Comparison — parameters, FLOPs, and disk footprint</a:t>
+            </a:r>
+            <a:endParaRPr lang="en-US" sz="2100" dirty="0"/>
+          </a:p>
+        </p:txBody>
+      </p:sp>
+      <p:sp>
+        <p:nvSpPr>
+          <p:cNvPr id="3" name="Shape 1"/>
+          <p:cNvSpPr/>
+          <p:nvPr/>
+        </p:nvSpPr>
+        <p:spPr>
+          <a:xfrm>
+            <a:off x="320040" y="841248"/>
+            <a:ext cx="2286000" cy="4114800"/>
+          </a:xfrm>
+          <a:prstGeom prst="rect">
+            <a:avLst/>
+          </a:prstGeom>
+          <a:solidFill>
+            <a:srgbClr val="FFFFFF"/>
+          </a:solidFill>
+          <a:ln w="6350">
+            <a:solidFill>
+              <a:srgbClr val="D0DAE4"/>
+            </a:solidFill>
+            <a:prstDash val="solid"/>
+          </a:ln>
+          <a:effectLst>
+            <a:outerShdw blurRad="88900" dist="25400" dir="8100000" algn="bl" rotWithShape="0">
+              <a:srgbClr val="000000">
+                <a:alpha val="10000"/>
+              </a:srgbClr>
+            </a:outerShdw>
+          </a:effectLst>
+        </p:spPr>
+      </p:sp>
+      <p:sp>
+        <p:nvSpPr>
+          <p:cNvPr id="4" name="Shape 2"/>
+          <p:cNvSpPr/>
+          <p:nvPr/>
+        </p:nvSpPr>
+        <p:spPr>
+          <a:xfrm>
+            <a:off x="320040" y="841248"/>
+            <a:ext cx="2286000" cy="64008"/>
+          </a:xfrm>
+          <a:prstGeom prst="rect">
+            <a:avLst/>
+          </a:prstGeom>
+          <a:solidFill>
+            <a:srgbClr val="B45309"/>
+          </a:solidFill>
+          <a:ln w="12700">
+            <a:solidFill>
+              <a:srgbClr val="B45309"/>
+            </a:solidFill>
+            <a:prstDash val="solid"/>
+          </a:ln>
+        </p:spPr>
+      </p:sp>
+      <p:sp>
+        <p:nvSpPr>
+          <p:cNvPr id="5" name="Text 3"/>
+          <p:cNvSpPr/>
+          <p:nvPr/>
+        </p:nvSpPr>
+        <p:spPr>
+          <a:xfrm>
+            <a:off x="320040" y="1097280"/>
+            <a:ext cx="2286000" cy="1005840"/>
+          </a:xfrm>
+          <a:prstGeom prst="rect">
+            <a:avLst/>
+          </a:prstGeom>
+          <a:noFill/>
+          <a:ln/>
+        </p:spPr>
+        <p:txBody>
+          <a:bodyPr wrap="square" lIns="0" tIns="0" rIns="0" bIns="0" rtlCol="0" anchor="ctr"/>
+          <a:lstStyle/>
+          <a:p>
+            <a:pPr marL="0" indent="0" algn="ctr">
+              <a:buNone/>
+            </a:pPr>
+            <a:r>
+              <a:rPr lang="en-US" sz="5200" b="1" dirty="0">
+                <a:solidFill>
+                  <a:srgbClr val="B45309"/>
+                </a:solidFill>
+                <a:latin typeface="Calibri" pitchFamily="34" charset="0"/>
+                <a:ea typeface="Calibri" pitchFamily="34" charset="-122"/>
+                <a:cs typeface="Calibri" pitchFamily="34" charset="-120"/>
+              </a:rPr>
+              <a:t>15.2×</a:t>
+            </a:r>
+            <a:endParaRPr lang="en-US" sz="5200" dirty="0"/>
+          </a:p>
+        </p:txBody>
+      </p:sp>
+      <p:sp>
+        <p:nvSpPr>
+          <p:cNvPr id="6" name="Text 4"/>
+          <p:cNvSpPr/>
+          <p:nvPr/>
+        </p:nvSpPr>
+        <p:spPr>
+          <a:xfrm>
+            <a:off x="320040" y="2121408"/>
+            <a:ext cx="2286000" cy="320040"/>
+          </a:xfrm>
+          <a:prstGeom prst="rect">
+            <a:avLst/>
+          </a:prstGeom>
+          <a:noFill/>
+          <a:ln/>
+        </p:spPr>
+        <p:txBody>
+          <a:bodyPr wrap="square" lIns="0" tIns="0" rIns="0" bIns="0" rtlCol="0" anchor="ctr"/>
+          <a:lstStyle/>
+          <a:p>
+            <a:pPr marL="0" indent="0" algn="ctr">
+              <a:buNone/>
+            </a:pPr>
+            <a:r>
+              <a:rPr lang="en-US" sz="1300" b="1" dirty="0">
+                <a:solidFill>
+                  <a:srgbClr val="B45309"/>
+                </a:solidFill>
+                <a:latin typeface="Calibri" pitchFamily="34" charset="0"/>
+                <a:ea typeface="Calibri" pitchFamily="34" charset="-122"/>
+                <a:cs typeface="Calibri" pitchFamily="34" charset="-120"/>
+              </a:rPr>
+              <a:t>fewer parameters</a:t>
+            </a:r>
+            <a:endParaRPr lang="en-US" sz="1300" dirty="0"/>
+          </a:p>
+        </p:txBody>
+      </p:sp>
+      <p:sp>
+        <p:nvSpPr>
+          <p:cNvPr id="7" name="Shape 5"/>
+          <p:cNvSpPr/>
+          <p:nvPr/>
+        </p:nvSpPr>
+        <p:spPr>
+          <a:xfrm>
+            <a:off x="502920" y="2542032"/>
+            <a:ext cx="1920240" cy="0"/>
+          </a:xfrm>
+          <a:prstGeom prst="line">
+            <a:avLst/>
+          </a:prstGeom>
+          <a:noFill/>
+          <a:ln w="6350">
+            <a:solidFill>
+              <a:srgbClr val="D0DAE4"/>
+            </a:solidFill>
+            <a:prstDash val="solid"/>
+          </a:ln>
+        </p:spPr>
+      </p:sp>
+      <p:sp>
+        <p:nvSpPr>
+          <p:cNvPr id="8" name="Text 6"/>
+          <p:cNvSpPr/>
+          <p:nvPr/>
+        </p:nvSpPr>
+        <p:spPr>
+          <a:xfrm>
+            <a:off x="457200" y="2706624"/>
+            <a:ext cx="2011680" cy="320040"/>
+          </a:xfrm>
+          <a:prstGeom prst="rect">
+            <a:avLst/>
+          </a:prstGeom>
+          <a:noFill/>
+          <a:ln/>
+        </p:spPr>
+        <p:txBody>
+          <a:bodyPr wrap="square" lIns="0" tIns="0" rIns="0" bIns="0" rtlCol="0" anchor="ctr"/>
+          <a:lstStyle/>
+          <a:p>
+            <a:pPr marL="0" indent="0" algn="ctr">
+              <a:buNone/>
+            </a:pPr>
+            <a:r>
+              <a:rPr lang="en-US" sz="1800" b="1" dirty="0">
+                <a:solidFill>
+                  <a:srgbClr val="028090"/>
+                </a:solidFill>
+                <a:latin typeface="Calibri" pitchFamily="34" charset="0"/>
+                <a:ea typeface="Calibri" pitchFamily="34" charset="-122"/>
+                <a:cs typeface="Calibri" pitchFamily="34" charset="-120"/>
+              </a:rPr>
+              <a:t>15.6×</a:t>
+            </a:r>
+            <a:endParaRPr lang="en-US" sz="1800" dirty="0"/>
+          </a:p>
+        </p:txBody>
+      </p:sp>
+      <p:sp>
+        <p:nvSpPr>
+          <p:cNvPr id="9" name="Text 7"/>
+          <p:cNvSpPr/>
+          <p:nvPr/>
+        </p:nvSpPr>
+        <p:spPr>
+          <a:xfrm>
+            <a:off x="457200" y="3017520"/>
+            <a:ext cx="2011680" cy="292608"/>
+          </a:xfrm>
+          <a:prstGeom prst="rect">
+            <a:avLst/>
+          </a:prstGeom>
+          <a:noFill/>
+          <a:ln/>
+        </p:spPr>
+        <p:txBody>
+          <a:bodyPr wrap="square" lIns="0" tIns="0" rIns="0" bIns="0" rtlCol="0" anchor="ctr"/>
+          <a:lstStyle/>
+          <a:p>
+            <a:pPr marL="0" indent="0" algn="ctr">
+              <a:buNone/>
+            </a:pPr>
+            <a:r>
+              <a:rPr lang="en-US" sz="950" dirty="0">
+                <a:solidFill>
+                  <a:srgbClr val="64748B"/>
+                </a:solidFill>
+                <a:latin typeface="Calibri Light" pitchFamily="34" charset="0"/>
+                <a:ea typeface="Calibri Light" pitchFamily="34" charset="-122"/>
+                <a:cs typeface="Calibri Light" pitchFamily="34" charset="-120"/>
+              </a:rPr>
+              <a:t>fewer FLOPs</a:t>
+            </a:r>
+            <a:endParaRPr lang="en-US" sz="950" dirty="0"/>
+          </a:p>
+          <a:p>
+            <a:pPr marL="0" indent="0" algn="ctr">
+              <a:buNone/>
+            </a:pPr>
+            <a:r>
+              <a:rPr lang="en-US" sz="950" dirty="0">
+                <a:solidFill>
+                  <a:srgbClr val="64748B"/>
+                </a:solidFill>
+                <a:latin typeface="Calibri Light" pitchFamily="34" charset="0"/>
+                <a:ea typeface="Calibri Light" pitchFamily="34" charset="-122"/>
+                <a:cs typeface="Calibri Light" pitchFamily="34" charset="-120"/>
+              </a:rPr>
+              <a:t>(16.87G → 1.08G)</a:t>
+            </a:r>
+            <a:endParaRPr lang="en-US" sz="950" dirty="0"/>
+          </a:p>
+        </p:txBody>
+      </p:sp>
+      <p:sp>
+        <p:nvSpPr>
+          <p:cNvPr id="10" name="Text 8"/>
+          <p:cNvSpPr/>
+          <p:nvPr/>
+        </p:nvSpPr>
+        <p:spPr>
+          <a:xfrm>
+            <a:off x="457200" y="3328416"/>
+            <a:ext cx="2011680" cy="320040"/>
+          </a:xfrm>
+          <a:prstGeom prst="rect">
+            <a:avLst/>
+          </a:prstGeom>
+          <a:noFill/>
+          <a:ln/>
+        </p:spPr>
+        <p:txBody>
+          <a:bodyPr wrap="square" lIns="0" tIns="0" rIns="0" bIns="0" rtlCol="0" anchor="ctr"/>
+          <a:lstStyle/>
+          <a:p>
+            <a:pPr marL="0" indent="0" algn="ctr">
+              <a:buNone/>
+            </a:pPr>
+            <a:r>
+              <a:rPr lang="en-US" sz="1800" b="1" dirty="0">
+                <a:solidFill>
+                  <a:srgbClr val="15803D"/>
+                </a:solidFill>
+                <a:latin typeface="Calibri" pitchFamily="34" charset="0"/>
+                <a:ea typeface="Calibri" pitchFamily="34" charset="-122"/>
+                <a:cs typeface="Calibri" pitchFamily="34" charset="-120"/>
+              </a:rPr>
+              <a:t>15.2×</a:t>
+            </a:r>
+            <a:endParaRPr lang="en-US" sz="1800" dirty="0"/>
+          </a:p>
+        </p:txBody>
+      </p:sp>
+      <p:sp>
+        <p:nvSpPr>
+          <p:cNvPr id="11" name="Text 9"/>
+          <p:cNvSpPr/>
+          <p:nvPr/>
+        </p:nvSpPr>
+        <p:spPr>
+          <a:xfrm>
+            <a:off x="457200" y="3639312"/>
+            <a:ext cx="2011680" cy="292608"/>
+          </a:xfrm>
+          <a:prstGeom prst="rect">
+            <a:avLst/>
+          </a:prstGeom>
+          <a:noFill/>
+          <a:ln/>
+        </p:spPr>
+        <p:txBody>
+          <a:bodyPr wrap="square" lIns="0" tIns="0" rIns="0" bIns="0" rtlCol="0" anchor="ctr"/>
+          <a:lstStyle/>
+          <a:p>
+            <a:pPr marL="0" indent="0" algn="ctr">
+              <a:buNone/>
+            </a:pPr>
+            <a:r>
+              <a:rPr lang="en-US" sz="950" dirty="0">
+                <a:solidFill>
+                  <a:srgbClr val="64748B"/>
+                </a:solidFill>
+                <a:latin typeface="Calibri Light" pitchFamily="34" charset="0"/>
+                <a:ea typeface="Calibri Light" pitchFamily="34" charset="-122"/>
+                <a:cs typeface="Calibri Light" pitchFamily="34" charset="-120"/>
+              </a:rPr>
+              <a:t>smaller on disk</a:t>
+            </a:r>
+            <a:endParaRPr lang="en-US" sz="950" dirty="0"/>
+          </a:p>
+          <a:p>
+            <a:pPr marL="0" indent="0" algn="ctr">
+              <a:buNone/>
+            </a:pPr>
+            <a:r>
+              <a:rPr lang="en-US" sz="950" dirty="0">
+                <a:solidFill>
+                  <a:srgbClr val="64748B"/>
+                </a:solidFill>
+                <a:latin typeface="Calibri Light" pitchFamily="34" charset="0"/>
+                <a:ea typeface="Calibri Light" pitchFamily="34" charset="-122"/>
+                <a:cs typeface="Calibri Light" pitchFamily="34" charset="-120"/>
+              </a:rPr>
+              <a:t>(344 MB → 23 MB)</a:t>
+            </a:r>
+            <a:endParaRPr lang="en-US" sz="950" dirty="0"/>
+          </a:p>
+        </p:txBody>
+      </p:sp>
+      <p:sp>
+        <p:nvSpPr>
+          <p:cNvPr id="12" name="Text 10"/>
+          <p:cNvSpPr/>
+          <p:nvPr/>
+        </p:nvSpPr>
+        <p:spPr>
+          <a:xfrm>
+            <a:off x="457200" y="3950208"/>
+            <a:ext cx="2011680" cy="320040"/>
+          </a:xfrm>
+          <a:prstGeom prst="rect">
+            <a:avLst/>
+          </a:prstGeom>
+          <a:noFill/>
+          <a:ln/>
+        </p:spPr>
+        <p:txBody>
+          <a:bodyPr wrap="square" lIns="0" tIns="0" rIns="0" bIns="0" rtlCol="0" anchor="ctr"/>
+          <a:lstStyle/>
+          <a:p>
+            <a:pPr marL="0" indent="0" algn="ctr">
+              <a:buNone/>
+            </a:pPr>
+            <a:r>
+              <a:rPr lang="en-US" sz="1800" b="1" dirty="0">
+                <a:solidFill>
+                  <a:srgbClr val="065A82"/>
+                </a:solidFill>
+                <a:latin typeface="Calibri" pitchFamily="34" charset="0"/>
+                <a:ea typeface="Calibri" pitchFamily="34" charset="-122"/>
+                <a:cs typeface="Calibri" pitchFamily="34" charset="-120"/>
+              </a:rPr>
+              <a:t>10.2×</a:t>
+            </a:r>
+            <a:endParaRPr lang="en-US" sz="1800" dirty="0"/>
+          </a:p>
+        </p:txBody>
+      </p:sp>
+      <p:sp>
+        <p:nvSpPr>
+          <p:cNvPr id="13" name="Text 11"/>
+          <p:cNvSpPr/>
+          <p:nvPr/>
+        </p:nvSpPr>
+        <p:spPr>
+          <a:xfrm>
+            <a:off x="457200" y="4261104"/>
+            <a:ext cx="2011680" cy="292608"/>
+          </a:xfrm>
+          <a:prstGeom prst="rect">
+            <a:avLst/>
+          </a:prstGeom>
+          <a:noFill/>
+          <a:ln/>
+        </p:spPr>
+        <p:txBody>
+          <a:bodyPr wrap="square" lIns="0" tIns="0" rIns="0" bIns="0" rtlCol="0" anchor="ctr"/>
+          <a:lstStyle/>
+          <a:p>
+            <a:pPr marL="0" indent="0" algn="ctr">
+              <a:buNone/>
+            </a:pPr>
+            <a:r>
+              <a:rPr lang="en-US" sz="950" dirty="0">
+                <a:solidFill>
+                  <a:srgbClr val="64748B"/>
+                </a:solidFill>
+                <a:latin typeface="Calibri Light" pitchFamily="34" charset="0"/>
+                <a:ea typeface="Calibri Light" pitchFamily="34" charset="-122"/>
+                <a:cs typeface="Calibri Light" pitchFamily="34" charset="-120"/>
+              </a:rPr>
+              <a:t>less GPU memory</a:t>
+            </a:r>
+            <a:endParaRPr lang="en-US" sz="950" dirty="0"/>
+          </a:p>
+          <a:p>
+            <a:pPr marL="0" indent="0" algn="ctr">
+              <a:buNone/>
+            </a:pPr>
+            <a:r>
+              <a:rPr lang="en-US" sz="950" dirty="0">
+                <a:solidFill>
+                  <a:srgbClr val="64748B"/>
+                </a:solidFill>
+                <a:latin typeface="Calibri Light" pitchFamily="34" charset="0"/>
+                <a:ea typeface="Calibri Light" pitchFamily="34" charset="-122"/>
+                <a:cs typeface="Calibri Light" pitchFamily="34" charset="-120"/>
+              </a:rPr>
+              <a:t>(361.7 → 35.6 MB)</a:t>
+            </a:r>
+            <a:endParaRPr lang="en-US" sz="950" dirty="0"/>
+          </a:p>
+        </p:txBody>
+      </p:sp>
+      <p:sp>
+        <p:nvSpPr>
+          <p:cNvPr id="14" name="Shape 12"/>
+          <p:cNvSpPr/>
+          <p:nvPr/>
+        </p:nvSpPr>
+        <p:spPr>
+          <a:xfrm>
+            <a:off x="2834640" y="841248"/>
+            <a:ext cx="5989320" cy="384048"/>
+          </a:xfrm>
+          <a:prstGeom prst="rect">
+            <a:avLst/>
+          </a:prstGeom>
+          <a:solidFill>
+            <a:srgbClr val="0D1B2A"/>
+          </a:solidFill>
+          <a:ln w="12700">
+            <a:solidFill>
+              <a:srgbClr val="0D1B2A"/>
+            </a:solidFill>
+            <a:prstDash val="solid"/>
+          </a:ln>
+        </p:spPr>
+      </p:sp>
+      <p:sp>
+        <p:nvSpPr>
+          <p:cNvPr id="15" name="Text 13"/>
+          <p:cNvSpPr/>
+          <p:nvPr/>
+        </p:nvSpPr>
+        <p:spPr>
+          <a:xfrm>
+            <a:off x="2907792" y="841248"/>
+            <a:ext cx="1325880" cy="384048"/>
+          </a:xfrm>
+          <a:prstGeom prst="rect">
+            <a:avLst/>
+          </a:prstGeom>
+          <a:noFill/>
+          <a:ln/>
+        </p:spPr>
+        <p:txBody>
+          <a:bodyPr wrap="square" rtlCol="0" anchor="ctr"/>
+          <a:lstStyle/>
+          <a:p>
+            <a:pPr marL="0" indent="0" algn="l">
+              <a:buNone/>
+            </a:pPr>
+            <a:r>
+              <a:rPr lang="en-US" sz="1050" b="1" dirty="0">
+                <a:solidFill>
+                  <a:srgbClr val="FFFFFF"/>
+                </a:solidFill>
+                <a:latin typeface="Calibri" pitchFamily="34" charset="0"/>
+                <a:ea typeface="Calibri" pitchFamily="34" charset="-122"/>
+                <a:cs typeface="Calibri" pitchFamily="34" charset="-120"/>
+              </a:rPr>
+              <a:t>Metric</a:t>
+            </a:r>
+            <a:endParaRPr lang="en-US" sz="1050" dirty="0"/>
+          </a:p>
+        </p:txBody>
+      </p:sp>
+      <p:sp>
+        <p:nvSpPr>
+          <p:cNvPr id="16" name="Text 14"/>
+          <p:cNvSpPr/>
+          <p:nvPr/>
+        </p:nvSpPr>
+        <p:spPr>
+          <a:xfrm>
+            <a:off x="4325112" y="841248"/>
+            <a:ext cx="1463040" cy="384048"/>
+          </a:xfrm>
+          <a:prstGeom prst="rect">
+            <a:avLst/>
+          </a:prstGeom>
+          <a:noFill/>
+          <a:ln/>
+        </p:spPr>
+        <p:txBody>
+          <a:bodyPr wrap="square" rtlCol="0" anchor="ctr"/>
+          <a:lstStyle/>
+          <a:p>
+            <a:pPr marL="0" indent="0" algn="ctr">
+              <a:buNone/>
+            </a:pPr>
+            <a:r>
+              <a:rPr lang="en-US" sz="1050" b="1" dirty="0">
+                <a:solidFill>
+                  <a:srgbClr val="FFFFFF"/>
+                </a:solidFill>
+                <a:latin typeface="Calibri" pitchFamily="34" charset="0"/>
+                <a:ea typeface="Calibri" pitchFamily="34" charset="-122"/>
+                <a:cs typeface="Calibri" pitchFamily="34" charset="-120"/>
+              </a:rPr>
+              <a:t>Teacher (ViT-Base)</a:t>
+            </a:r>
+            <a:endParaRPr lang="en-US" sz="1050" dirty="0"/>
+          </a:p>
+        </p:txBody>
+      </p:sp>
+      <p:sp>
+        <p:nvSpPr>
+          <p:cNvPr id="17" name="Text 15"/>
+          <p:cNvSpPr/>
+          <p:nvPr/>
+        </p:nvSpPr>
+        <p:spPr>
+          <a:xfrm>
+            <a:off x="5879592" y="841248"/>
+            <a:ext cx="1463040" cy="384048"/>
+          </a:xfrm>
+          <a:prstGeom prst="rect">
+            <a:avLst/>
+          </a:prstGeom>
+          <a:noFill/>
+          <a:ln/>
+        </p:spPr>
+        <p:txBody>
+          <a:bodyPr wrap="square" rtlCol="0" anchor="ctr"/>
+          <a:lstStyle/>
+          <a:p>
+            <a:pPr marL="0" indent="0" algn="ctr">
+              <a:buNone/>
+            </a:pPr>
+            <a:r>
+              <a:rPr lang="en-US" sz="1050" b="1" dirty="0">
+                <a:solidFill>
+                  <a:srgbClr val="FFFFFF"/>
+                </a:solidFill>
+                <a:latin typeface="Calibri" pitchFamily="34" charset="0"/>
+                <a:ea typeface="Calibri" pitchFamily="34" charset="-122"/>
+                <a:cs typeface="Calibri" pitchFamily="34" charset="-120"/>
+              </a:rPr>
+              <a:t>Student (ViT-Tiny)</a:t>
+            </a:r>
+            <a:endParaRPr lang="en-US" sz="1050" dirty="0"/>
+          </a:p>
+        </p:txBody>
+      </p:sp>
+      <p:sp>
+        <p:nvSpPr>
+          <p:cNvPr id="18" name="Text 16"/>
+          <p:cNvSpPr/>
+          <p:nvPr/>
+        </p:nvSpPr>
+        <p:spPr>
+          <a:xfrm>
+            <a:off x="7434072" y="841248"/>
+            <a:ext cx="1005840" cy="384048"/>
+          </a:xfrm>
+          <a:prstGeom prst="rect">
+            <a:avLst/>
+          </a:prstGeom>
+          <a:noFill/>
+          <a:ln/>
+        </p:spPr>
+        <p:txBody>
+          <a:bodyPr wrap="square" rtlCol="0" anchor="ctr"/>
+          <a:lstStyle/>
+          <a:p>
+            <a:pPr marL="0" indent="0" algn="ctr">
+              <a:buNone/>
+            </a:pPr>
+            <a:r>
+              <a:rPr lang="en-US" sz="1050" b="1" dirty="0">
+                <a:solidFill>
+                  <a:srgbClr val="FFFFFF"/>
+                </a:solidFill>
+                <a:latin typeface="Calibri" pitchFamily="34" charset="0"/>
+                <a:ea typeface="Calibri" pitchFamily="34" charset="-122"/>
+                <a:cs typeface="Calibri" pitchFamily="34" charset="-120"/>
+              </a:rPr>
+              <a:t>Ratio</a:t>
+            </a:r>
+            <a:endParaRPr lang="en-US" sz="1050" dirty="0"/>
+          </a:p>
+        </p:txBody>
+      </p:sp>
+      <p:sp>
+        <p:nvSpPr>
+          <p:cNvPr id="19" name="Shape 17"/>
+          <p:cNvSpPr/>
+          <p:nvPr/>
+        </p:nvSpPr>
+        <p:spPr>
+          <a:xfrm>
+            <a:off x="2834640" y="1225296"/>
+            <a:ext cx="5989320" cy="621792"/>
+          </a:xfrm>
+          <a:prstGeom prst="rect">
+            <a:avLst/>
+          </a:prstGeom>
+          <a:solidFill>
+            <a:srgbClr val="FFFFFF"/>
+          </a:solidFill>
+          <a:ln w="3810">
+            <a:solidFill>
+              <a:srgbClr val="D0DAE4"/>
+            </a:solidFill>
+            <a:prstDash val="solid"/>
+          </a:ln>
+        </p:spPr>
+      </p:sp>
+      <p:sp>
+        <p:nvSpPr>
+          <p:cNvPr id="20" name="Text 18"/>
+          <p:cNvSpPr/>
+          <p:nvPr/>
+        </p:nvSpPr>
+        <p:spPr>
+          <a:xfrm>
+            <a:off x="2907792" y="1353312"/>
+            <a:ext cx="1252728" cy="347472"/>
+          </a:xfrm>
+          <a:prstGeom prst="rect">
+            <a:avLst/>
+          </a:prstGeom>
+          <a:noFill/>
+          <a:ln/>
+        </p:spPr>
+        <p:txBody>
+          <a:bodyPr wrap="square" rtlCol="0" anchor="ctr"/>
+          <a:lstStyle/>
+          <a:p>
+            <a:pPr marL="0" indent="0" algn="l">
+              <a:buNone/>
+            </a:pPr>
+            <a:r>
+              <a:rPr lang="en-US" sz="1150" dirty="0">
+                <a:solidFill>
+                  <a:srgbClr val="1C2B38"/>
+                </a:solidFill>
+                <a:latin typeface="Calibri Light" pitchFamily="34" charset="0"/>
+                <a:ea typeface="Calibri Light" pitchFamily="34" charset="-122"/>
+                <a:cs typeface="Calibri Light" pitchFamily="34" charset="-120"/>
+              </a:rPr>
+              <a:t>Parameters</a:t>
+            </a:r>
+            <a:endParaRPr lang="en-US" sz="1150" dirty="0"/>
+          </a:p>
+        </p:txBody>
+      </p:sp>
+      <p:sp>
+        <p:nvSpPr>
+          <p:cNvPr id="21" name="Text 19"/>
+          <p:cNvSpPr/>
+          <p:nvPr/>
+        </p:nvSpPr>
+        <p:spPr>
+          <a:xfrm>
+            <a:off x="4325112" y="1353312"/>
+            <a:ext cx="1389888" cy="347472"/>
+          </a:xfrm>
+          <a:prstGeom prst="rect">
+            <a:avLst/>
+          </a:prstGeom>
+          <a:noFill/>
+          <a:ln/>
+        </p:spPr>
+        <p:txBody>
+          <a:bodyPr wrap="square" rtlCol="0" anchor="ctr"/>
+          <a:lstStyle/>
+          <a:p>
+            <a:pPr marL="0" indent="0" algn="ctr">
+              <a:buNone/>
+            </a:pPr>
+            <a:r>
+              <a:rPr lang="en-US" sz="1150" dirty="0">
+                <a:solidFill>
+                  <a:srgbClr val="1C2B38"/>
+                </a:solidFill>
+                <a:latin typeface="Calibri Light" pitchFamily="34" charset="0"/>
+                <a:ea typeface="Calibri Light" pitchFamily="34" charset="-122"/>
+                <a:cs typeface="Calibri Light" pitchFamily="34" charset="-120"/>
+              </a:rPr>
+              <a:t>86.0M</a:t>
+            </a:r>
+            <a:endParaRPr lang="en-US" sz="1150" dirty="0"/>
+          </a:p>
+        </p:txBody>
+      </p:sp>
+      <p:sp>
+        <p:nvSpPr>
+          <p:cNvPr id="22" name="Text 20"/>
+          <p:cNvSpPr/>
+          <p:nvPr/>
+        </p:nvSpPr>
+        <p:spPr>
+          <a:xfrm>
+            <a:off x="5879592" y="1353312"/>
+            <a:ext cx="1389888" cy="347472"/>
+          </a:xfrm>
+          <a:prstGeom prst="rect">
+            <a:avLst/>
+          </a:prstGeom>
+          <a:noFill/>
+          <a:ln/>
+        </p:spPr>
+        <p:txBody>
+          <a:bodyPr wrap="square" rtlCol="0" anchor="ctr"/>
+          <a:lstStyle/>
+          <a:p>
+            <a:pPr marL="0" indent="0" algn="ctr">
+              <a:buNone/>
+            </a:pPr>
+            <a:r>
+              <a:rPr lang="en-US" sz="1150" dirty="0">
+                <a:solidFill>
+                  <a:srgbClr val="1C2B38"/>
+                </a:solidFill>
+                <a:latin typeface="Calibri Light" pitchFamily="34" charset="0"/>
+                <a:ea typeface="Calibri Light" pitchFamily="34" charset="-122"/>
+                <a:cs typeface="Calibri Light" pitchFamily="34" charset="-120"/>
+              </a:rPr>
+              <a:t>5.6M</a:t>
+            </a:r>
+            <a:endParaRPr lang="en-US" sz="1150" dirty="0"/>
+          </a:p>
+        </p:txBody>
+      </p:sp>
+      <p:sp>
+        <p:nvSpPr>
+          <p:cNvPr id="23" name="Text 21"/>
+          <p:cNvSpPr/>
+          <p:nvPr/>
+        </p:nvSpPr>
+        <p:spPr>
+          <a:xfrm>
+            <a:off x="7434072" y="1353312"/>
+            <a:ext cx="932688" cy="347472"/>
+          </a:xfrm>
+          <a:prstGeom prst="rect">
+            <a:avLst/>
+          </a:prstGeom>
+          <a:noFill/>
+          <a:ln/>
+        </p:spPr>
+        <p:txBody>
+          <a:bodyPr wrap="square" rtlCol="0" anchor="ctr"/>
+          <a:lstStyle/>
+          <a:p>
+            <a:pPr marL="0" indent="0" algn="ctr">
+              <a:buNone/>
+            </a:pPr>
+            <a:r>
+              <a:rPr lang="en-US" sz="1150" b="1" dirty="0">
+                <a:solidFill>
+                  <a:srgbClr val="B45309"/>
+                </a:solidFill>
+                <a:latin typeface="Calibri" pitchFamily="34" charset="0"/>
+                <a:ea typeface="Calibri" pitchFamily="34" charset="-122"/>
+                <a:cs typeface="Calibri" pitchFamily="34" charset="-120"/>
+              </a:rPr>
+              <a:t>15.2×</a:t>
+            </a:r>
+            <a:endParaRPr lang="en-US" sz="1150" dirty="0"/>
+          </a:p>
+        </p:txBody>
+      </p:sp>
+      <p:sp>
+        <p:nvSpPr>
+          <p:cNvPr id="24" name="Shape 22"/>
+          <p:cNvSpPr/>
+          <p:nvPr/>
+        </p:nvSpPr>
+        <p:spPr>
+          <a:xfrm>
+            <a:off x="2834640" y="1911096"/>
+            <a:ext cx="5989320" cy="621792"/>
+          </a:xfrm>
+          <a:prstGeom prst="rect">
+            <a:avLst/>
+          </a:prstGeom>
+          <a:solidFill>
+            <a:srgbClr val="F6F9FB"/>
+          </a:solidFill>
+          <a:ln w="3810">
+            <a:solidFill>
+              <a:srgbClr val="D0DAE4"/>
+            </a:solidFill>
+            <a:prstDash val="solid"/>
+          </a:ln>
+        </p:spPr>
+      </p:sp>
+      <p:sp>
+        <p:nvSpPr>
+          <p:cNvPr id="25" name="Text 23"/>
+          <p:cNvSpPr/>
+          <p:nvPr/>
+        </p:nvSpPr>
+        <p:spPr>
+          <a:xfrm>
+            <a:off x="2907792" y="2039112"/>
+            <a:ext cx="1252728" cy="347472"/>
+          </a:xfrm>
+          <a:prstGeom prst="rect">
+            <a:avLst/>
+          </a:prstGeom>
+          <a:noFill/>
+          <a:ln/>
+        </p:spPr>
+        <p:txBody>
+          <a:bodyPr wrap="square" rtlCol="0" anchor="ctr"/>
+          <a:lstStyle/>
+          <a:p>
+            <a:pPr marL="0" indent="0" algn="l">
+              <a:buNone/>
+            </a:pPr>
+            <a:r>
+              <a:rPr lang="en-US" sz="1150" dirty="0">
+                <a:solidFill>
+                  <a:srgbClr val="1C2B38"/>
+                </a:solidFill>
+                <a:latin typeface="Calibri Light" pitchFamily="34" charset="0"/>
+                <a:ea typeface="Calibri Light" pitchFamily="34" charset="-122"/>
+                <a:cs typeface="Calibri Light" pitchFamily="34" charset="-120"/>
+              </a:rPr>
+              <a:t>FLOPs (BS=1)</a:t>
+            </a:r>
+            <a:endParaRPr lang="en-US" sz="1150" dirty="0"/>
+          </a:p>
+        </p:txBody>
+      </p:sp>
+      <p:sp>
+        <p:nvSpPr>
+          <p:cNvPr id="26" name="Text 24"/>
+          <p:cNvSpPr/>
+          <p:nvPr/>
+        </p:nvSpPr>
+        <p:spPr>
+          <a:xfrm>
+            <a:off x="4325112" y="2039112"/>
+            <a:ext cx="1389888" cy="347472"/>
+          </a:xfrm>
+          <a:prstGeom prst="rect">
+            <a:avLst/>
+          </a:prstGeom>
+          <a:noFill/>
+          <a:ln/>
+        </p:spPr>
+        <p:txBody>
+          <a:bodyPr wrap="square" rtlCol="0" anchor="ctr"/>
+          <a:lstStyle/>
+          <a:p>
+            <a:pPr marL="0" indent="0" algn="ctr">
+              <a:buNone/>
+            </a:pPr>
+            <a:r>
+              <a:rPr lang="en-US" sz="1150" dirty="0">
+                <a:solidFill>
+                  <a:srgbClr val="1C2B38"/>
+                </a:solidFill>
+                <a:latin typeface="Calibri Light" pitchFamily="34" charset="0"/>
+                <a:ea typeface="Calibri Light" pitchFamily="34" charset="-122"/>
+                <a:cs typeface="Calibri Light" pitchFamily="34" charset="-120"/>
+              </a:rPr>
+              <a:t>16.87G</a:t>
+            </a:r>
+            <a:endParaRPr lang="en-US" sz="1150" dirty="0"/>
+          </a:p>
+        </p:txBody>
+      </p:sp>
+      <p:sp>
+        <p:nvSpPr>
+          <p:cNvPr id="27" name="Text 25"/>
+          <p:cNvSpPr/>
+          <p:nvPr/>
+        </p:nvSpPr>
+        <p:spPr>
+          <a:xfrm>
+            <a:off x="5879592" y="2039112"/>
+            <a:ext cx="1389888" cy="347472"/>
+          </a:xfrm>
+          <a:prstGeom prst="rect">
+            <a:avLst/>
+          </a:prstGeom>
+          <a:noFill/>
+          <a:ln/>
+        </p:spPr>
+        <p:txBody>
+          <a:bodyPr wrap="square" rtlCol="0" anchor="ctr"/>
+          <a:lstStyle/>
+          <a:p>
+            <a:pPr marL="0" indent="0" algn="ctr">
+              <a:buNone/>
+            </a:pPr>
+            <a:r>
+              <a:rPr lang="en-US" sz="1150" dirty="0">
+                <a:solidFill>
+                  <a:srgbClr val="1C2B38"/>
+                </a:solidFill>
+                <a:latin typeface="Calibri Light" pitchFamily="34" charset="0"/>
+                <a:ea typeface="Calibri Light" pitchFamily="34" charset="-122"/>
+                <a:cs typeface="Calibri Light" pitchFamily="34" charset="-120"/>
+              </a:rPr>
+              <a:t>1.08G</a:t>
+            </a:r>
+            <a:endParaRPr lang="en-US" sz="1150" dirty="0"/>
+          </a:p>
+        </p:txBody>
+      </p:sp>
+      <p:sp>
+        <p:nvSpPr>
+          <p:cNvPr id="28" name="Text 26"/>
+          <p:cNvSpPr/>
+          <p:nvPr/>
+        </p:nvSpPr>
+        <p:spPr>
+          <a:xfrm>
+            <a:off x="7434072" y="2039112"/>
+            <a:ext cx="932688" cy="347472"/>
+          </a:xfrm>
+          <a:prstGeom prst="rect">
+            <a:avLst/>
+          </a:prstGeom>
+          <a:noFill/>
+          <a:ln/>
+        </p:spPr>
+        <p:txBody>
+          <a:bodyPr wrap="square" rtlCol="0" anchor="ctr"/>
+          <a:lstStyle/>
+          <a:p>
+            <a:pPr marL="0" indent="0" algn="ctr">
+              <a:buNone/>
+            </a:pPr>
+            <a:r>
+              <a:rPr lang="en-US" sz="1150" b="1" dirty="0">
+                <a:solidFill>
+                  <a:srgbClr val="B45309"/>
+                </a:solidFill>
+                <a:latin typeface="Calibri" pitchFamily="34" charset="0"/>
+                <a:ea typeface="Calibri" pitchFamily="34" charset="-122"/>
+                <a:cs typeface="Calibri" pitchFamily="34" charset="-120"/>
+              </a:rPr>
+              <a:t>15.6×</a:t>
+            </a:r>
+            <a:endParaRPr lang="en-US" sz="1150" dirty="0"/>
+          </a:p>
+        </p:txBody>
+      </p:sp>
+      <p:sp>
+        <p:nvSpPr>
+          <p:cNvPr id="29" name="Shape 27"/>
+          <p:cNvSpPr/>
+          <p:nvPr/>
+        </p:nvSpPr>
+        <p:spPr>
+          <a:xfrm>
+            <a:off x="2834640" y="2596896"/>
+            <a:ext cx="5989320" cy="621792"/>
+          </a:xfrm>
+          <a:prstGeom prst="rect">
+            <a:avLst/>
+          </a:prstGeom>
+          <a:solidFill>
+            <a:srgbClr val="FFFFFF"/>
+          </a:solidFill>
+          <a:ln w="3810">
+            <a:solidFill>
+              <a:srgbClr val="D0DAE4"/>
+            </a:solidFill>
+            <a:prstDash val="solid"/>
+          </a:ln>
+        </p:spPr>
+      </p:sp>
+      <p:sp>
+        <p:nvSpPr>
+          <p:cNvPr id="30" name="Text 28"/>
+          <p:cNvSpPr/>
+          <p:nvPr/>
+        </p:nvSpPr>
+        <p:spPr>
+          <a:xfrm>
+            <a:off x="2907792" y="2724912"/>
+            <a:ext cx="1252728" cy="347472"/>
+          </a:xfrm>
+          <a:prstGeom prst="rect">
+            <a:avLst/>
+          </a:prstGeom>
+          <a:noFill/>
+          <a:ln/>
+        </p:spPr>
+        <p:txBody>
+          <a:bodyPr wrap="square" rtlCol="0" anchor="ctr"/>
+          <a:lstStyle/>
+          <a:p>
+            <a:pPr marL="0" indent="0" algn="l">
+              <a:buNone/>
+            </a:pPr>
+            <a:r>
+              <a:rPr lang="en-US" sz="1150" dirty="0">
+                <a:solidFill>
+                  <a:srgbClr val="1C2B38"/>
+                </a:solidFill>
+                <a:latin typeface="Calibri Light" pitchFamily="34" charset="0"/>
+                <a:ea typeface="Calibri Light" pitchFamily="34" charset="-122"/>
+                <a:cs typeface="Calibri Light" pitchFamily="34" charset="-120"/>
+              </a:rPr>
+              <a:t>Disk size</a:t>
+            </a:r>
+            <a:endParaRPr lang="en-US" sz="1150" dirty="0"/>
+          </a:p>
+        </p:txBody>
+      </p:sp>
+      <p:sp>
+        <p:nvSpPr>
+          <p:cNvPr id="31" name="Text 29"/>
+          <p:cNvSpPr/>
+          <p:nvPr/>
+        </p:nvSpPr>
+        <p:spPr>
+          <a:xfrm>
+            <a:off x="4325112" y="2724912"/>
+            <a:ext cx="1389888" cy="347472"/>
+          </a:xfrm>
+          <a:prstGeom prst="rect">
+            <a:avLst/>
+          </a:prstGeom>
+          <a:noFill/>
+          <a:ln/>
+        </p:spPr>
+        <p:txBody>
+          <a:bodyPr wrap="square" rtlCol="0" anchor="ctr"/>
+          <a:lstStyle/>
+          <a:p>
+            <a:pPr marL="0" indent="0" algn="ctr">
+              <a:buNone/>
+            </a:pPr>
+            <a:r>
+              <a:rPr lang="en-US" sz="1150" dirty="0">
+                <a:solidFill>
+                  <a:srgbClr val="1C2B38"/>
+                </a:solidFill>
+                <a:latin typeface="Calibri Light" pitchFamily="34" charset="0"/>
+                <a:ea typeface="Calibri Light" pitchFamily="34" charset="-122"/>
+                <a:cs typeface="Calibri Light" pitchFamily="34" charset="-120"/>
+              </a:rPr>
+              <a:t>344 MB</a:t>
+            </a:r>
+            <a:endParaRPr lang="en-US" sz="1150" dirty="0"/>
+          </a:p>
+        </p:txBody>
+      </p:sp>
+      <p:sp>
+        <p:nvSpPr>
+          <p:cNvPr id="32" name="Text 30"/>
+          <p:cNvSpPr/>
+          <p:nvPr/>
+        </p:nvSpPr>
+        <p:spPr>
+          <a:xfrm>
+            <a:off x="5879592" y="2724912"/>
+            <a:ext cx="1389888" cy="347472"/>
+          </a:xfrm>
+          <a:prstGeom prst="rect">
+            <a:avLst/>
+          </a:prstGeom>
+          <a:noFill/>
+          <a:ln/>
+        </p:spPr>
+        <p:txBody>
+          <a:bodyPr wrap="square" rtlCol="0" anchor="ctr"/>
+          <a:lstStyle/>
+          <a:p>
+            <a:pPr marL="0" indent="0" algn="ctr">
+              <a:buNone/>
+            </a:pPr>
+            <a:r>
+              <a:rPr lang="en-US" sz="1150" dirty="0">
+                <a:solidFill>
+                  <a:srgbClr val="1C2B38"/>
+                </a:solidFill>
+                <a:latin typeface="Calibri Light" pitchFamily="34" charset="0"/>
+                <a:ea typeface="Calibri Light" pitchFamily="34" charset="-122"/>
+                <a:cs typeface="Calibri Light" pitchFamily="34" charset="-120"/>
+              </a:rPr>
+              <a:t>23 MB</a:t>
+            </a:r>
+            <a:endParaRPr lang="en-US" sz="1150" dirty="0"/>
+          </a:p>
+        </p:txBody>
+      </p:sp>
+      <p:sp>
+        <p:nvSpPr>
+          <p:cNvPr id="33" name="Text 31"/>
+          <p:cNvSpPr/>
+          <p:nvPr/>
+        </p:nvSpPr>
+        <p:spPr>
+          <a:xfrm>
+            <a:off x="7434072" y="2724912"/>
+            <a:ext cx="932688" cy="347472"/>
+          </a:xfrm>
+          <a:prstGeom prst="rect">
+            <a:avLst/>
+          </a:prstGeom>
+          <a:noFill/>
+          <a:ln/>
+        </p:spPr>
+        <p:txBody>
+          <a:bodyPr wrap="square" rtlCol="0" anchor="ctr"/>
+          <a:lstStyle/>
+          <a:p>
+            <a:pPr marL="0" indent="0" algn="ctr">
+              <a:buNone/>
+            </a:pPr>
+            <a:r>
+              <a:rPr lang="en-US" sz="1150" b="1" dirty="0">
+                <a:solidFill>
+                  <a:srgbClr val="B45309"/>
+                </a:solidFill>
+                <a:latin typeface="Calibri" pitchFamily="34" charset="0"/>
+                <a:ea typeface="Calibri" pitchFamily="34" charset="-122"/>
+                <a:cs typeface="Calibri" pitchFamily="34" charset="-120"/>
+              </a:rPr>
+              <a:t>15.2×</a:t>
+            </a:r>
+            <a:endParaRPr lang="en-US" sz="1150" dirty="0"/>
+          </a:p>
+        </p:txBody>
+      </p:sp>
+      <p:sp>
+        <p:nvSpPr>
+          <p:cNvPr id="34" name="Shape 32"/>
+          <p:cNvSpPr/>
+          <p:nvPr/>
+        </p:nvSpPr>
+        <p:spPr>
+          <a:xfrm>
+            <a:off x="2834640" y="3282696"/>
+            <a:ext cx="5989320" cy="621792"/>
+          </a:xfrm>
+          <a:prstGeom prst="rect">
+            <a:avLst/>
+          </a:prstGeom>
+          <a:solidFill>
+            <a:srgbClr val="F6F9FB"/>
+          </a:solidFill>
+          <a:ln w="3810">
+            <a:solidFill>
+              <a:srgbClr val="D0DAE4"/>
+            </a:solidFill>
+            <a:prstDash val="solid"/>
+          </a:ln>
+        </p:spPr>
+      </p:sp>
+      <p:sp>
+        <p:nvSpPr>
+          <p:cNvPr id="35" name="Text 33"/>
+          <p:cNvSpPr/>
+          <p:nvPr/>
+        </p:nvSpPr>
+        <p:spPr>
+          <a:xfrm>
+            <a:off x="2907792" y="3410712"/>
+            <a:ext cx="1252728" cy="347472"/>
+          </a:xfrm>
+          <a:prstGeom prst="rect">
+            <a:avLst/>
+          </a:prstGeom>
+          <a:noFill/>
+          <a:ln/>
+        </p:spPr>
+        <p:txBody>
+          <a:bodyPr wrap="square" rtlCol="0" anchor="ctr"/>
+          <a:lstStyle/>
+          <a:p>
+            <a:pPr marL="0" indent="0" algn="l">
+              <a:buNone/>
+            </a:pPr>
+            <a:r>
+              <a:rPr lang="en-US" sz="1150" dirty="0">
+                <a:solidFill>
+                  <a:srgbClr val="1C2B38"/>
+                </a:solidFill>
+                <a:latin typeface="Calibri Light" pitchFamily="34" charset="0"/>
+                <a:ea typeface="Calibri Light" pitchFamily="34" charset="-122"/>
+                <a:cs typeface="Calibri Light" pitchFamily="34" charset="-120"/>
+              </a:rPr>
+              <a:t>GPU memory</a:t>
+            </a:r>
+            <a:endParaRPr lang="en-US" sz="1150" dirty="0"/>
+          </a:p>
+        </p:txBody>
+      </p:sp>
+      <p:sp>
+        <p:nvSpPr>
+          <p:cNvPr id="36" name="Text 34"/>
+          <p:cNvSpPr/>
+          <p:nvPr/>
+        </p:nvSpPr>
+        <p:spPr>
+          <a:xfrm>
+            <a:off x="4325112" y="3410712"/>
+            <a:ext cx="1389888" cy="347472"/>
+          </a:xfrm>
+          <a:prstGeom prst="rect">
+            <a:avLst/>
+          </a:prstGeom>
+          <a:noFill/>
+          <a:ln/>
+        </p:spPr>
+        <p:txBody>
+          <a:bodyPr wrap="square" rtlCol="0" anchor="ctr"/>
+          <a:lstStyle/>
+          <a:p>
+            <a:pPr marL="0" indent="0" algn="ctr">
+              <a:buNone/>
+            </a:pPr>
+            <a:r>
+              <a:rPr lang="en-US" sz="1150" dirty="0">
+                <a:solidFill>
+                  <a:srgbClr val="1C2B38"/>
+                </a:solidFill>
+                <a:latin typeface="Calibri Light" pitchFamily="34" charset="0"/>
+                <a:ea typeface="Calibri Light" pitchFamily="34" charset="-122"/>
+                <a:cs typeface="Calibri Light" pitchFamily="34" charset="-120"/>
+              </a:rPr>
+              <a:t>361.7 MB</a:t>
+            </a:r>
+            <a:endParaRPr lang="en-US" sz="1150" dirty="0"/>
+          </a:p>
+        </p:txBody>
+      </p:sp>
+      <p:sp>
+        <p:nvSpPr>
+          <p:cNvPr id="37" name="Text 35"/>
+          <p:cNvSpPr/>
+          <p:nvPr/>
+        </p:nvSpPr>
+        <p:spPr>
+          <a:xfrm>
+            <a:off x="5879592" y="3410712"/>
+            <a:ext cx="1389888" cy="347472"/>
+          </a:xfrm>
+          <a:prstGeom prst="rect">
+            <a:avLst/>
+          </a:prstGeom>
+          <a:noFill/>
+          <a:ln/>
+        </p:spPr>
+        <p:txBody>
+          <a:bodyPr wrap="square" rtlCol="0" anchor="ctr"/>
+          <a:lstStyle/>
+          <a:p>
+            <a:pPr marL="0" indent="0" algn="ctr">
+              <a:buNone/>
+            </a:pPr>
+            <a:r>
+              <a:rPr lang="en-US" sz="1150" dirty="0">
+                <a:solidFill>
+                  <a:srgbClr val="1C2B38"/>
+                </a:solidFill>
+                <a:latin typeface="Calibri Light" pitchFamily="34" charset="0"/>
+                <a:ea typeface="Calibri Light" pitchFamily="34" charset="-122"/>
+                <a:cs typeface="Calibri Light" pitchFamily="34" charset="-120"/>
+              </a:rPr>
+              <a:t>35.6 MB</a:t>
+            </a:r>
+            <a:endParaRPr lang="en-US" sz="1150" dirty="0"/>
+          </a:p>
+        </p:txBody>
+      </p:sp>
+      <p:sp>
+        <p:nvSpPr>
+          <p:cNvPr id="38" name="Text 36"/>
+          <p:cNvSpPr/>
+          <p:nvPr/>
+        </p:nvSpPr>
+        <p:spPr>
+          <a:xfrm>
+            <a:off x="7434072" y="3410712"/>
+            <a:ext cx="932688" cy="347472"/>
+          </a:xfrm>
+          <a:prstGeom prst="rect">
+            <a:avLst/>
+          </a:prstGeom>
+          <a:noFill/>
+          <a:ln/>
+        </p:spPr>
+        <p:txBody>
+          <a:bodyPr wrap="square" rtlCol="0" anchor="ctr"/>
+          <a:lstStyle/>
+          <a:p>
+            <a:pPr marL="0" indent="0" algn="ctr">
+              <a:buNone/>
+            </a:pPr>
+            <a:r>
+              <a:rPr lang="en-US" sz="1150" b="1" dirty="0">
+                <a:solidFill>
+                  <a:srgbClr val="B45309"/>
+                </a:solidFill>
+                <a:latin typeface="Calibri" pitchFamily="34" charset="0"/>
+                <a:ea typeface="Calibri" pitchFamily="34" charset="-122"/>
+                <a:cs typeface="Calibri" pitchFamily="34" charset="-120"/>
+              </a:rPr>
+              <a:t>10.2×</a:t>
+            </a:r>
+            <a:endParaRPr lang="en-US" sz="1150" dirty="0"/>
+          </a:p>
+        </p:txBody>
+      </p:sp>
+    </p:spTree>
+  </p:cSld>
+  <p:clrMapOvr>
+    <a:masterClrMapping/>
+  </p:clrMapOvr>
+</p:sld>
+</file>
+
+<file path=ppt/slides/slide39.xml><?xml version="1.0" encoding="utf-8"?>
 <p:sld xmlns:a="http://schemas.openxmlformats.org/drawingml/2006/main" xmlns:r="http://schemas.openxmlformats.org/officeDocument/2006/relationships" xmlns:p="http://schemas.openxmlformats.org/presentationml/2006/main">
   <p:cSld name="Slide 19">
     <p:bg>
